--- a/docs/Concordance-deck.pptx
+++ b/docs/Concordance-deck.pptx
@@ -864,7 +864,7 @@
           <a:p>
             <a:r>
               <a:rPr lang="en-US" dirty="0"/>
-              <a:t>Four capabilities, one mechanism underneath: the fingerprint binding.</a:t>
+              <a:t>Five capabilities, one mechanism underneath: the fingerprint binding. The chatbot is grounded in the same graph, so it cannot contradict the documents.</a:t>
             </a:r>
             <a:endParaRPr lang="en-US" dirty="0"/>
           </a:p>
@@ -1216,7 +1216,7 @@
           <a:p>
             <a:r>
               <a:rPr lang="en-US" dirty="0"/>
-              <a:t>DuckDB stands in for the warehouse; a Snowflake connector ships and is unit-tested, unauthenticated against a live account.</a:t>
+              <a:t>DuckDB is the working warehouse and needs no credentials; connectors for Snowflake, Databricks, Redshift and Athena ship alongside it, unit-tested but never run against a live account.</a:t>
             </a:r>
             <a:endParaRPr lang="en-US" dirty="0"/>
           </a:p>
@@ -2206,7 +2206,7 @@
                 <a:ea typeface="Calibri" pitchFamily="34" charset="-122"/>
                 <a:cs typeface="Calibri" pitchFamily="34" charset="-120"/>
               </a:rPr>
-              <a:t>Both Power BI formats. 531 tests. Drift, reconciliation, lineage to source, the chatbot and the decision log all verified against real models — several bugs in this list were found that way, not by unit tests.</a:t>
+              <a:t>Both Power BI formats. 797 tests. Drift, reconciliation against DuckDB, lineage to source, RLS and calculation-group logic, the 15-tool chatbot and the decision log — all verified against real models. Several bugs here were found that way, not by unit tests.</a:t>
             </a:r>
             <a:endParaRPr lang="en-US" sz="1200" dirty="0"/>
           </a:p>
@@ -2334,7 +2334,7 @@
                 <a:ea typeface="Calibri" pitchFamily="34" charset="-122"/>
                 <a:cs typeface="Calibri" pitchFamily="34" charset="-120"/>
               </a:rPr>
-              <a:t>A Snowflake connector ships and is unit-tested against a DB-API cursor. It has never authenticated to a live account — the sandbox blocks that host at the network layer, which was confirmed rather than assumed.</a:t>
+              <a:t>Connectors for Snowflake, Databricks, Redshift and Athena share the DuckDB code path and are unit-tested against a DB-API cursor — parameters, per-platform identifier case folding, SQL dialect. None has authenticated to a live account; the sandbox blocks those hosts, confirmed rather than assumed.</a:t>
             </a:r>
             <a:endParaRPr lang="en-US" sz="1200" dirty="0"/>
           </a:p>
@@ -2462,7 +2462,7 @@
                 <a:ea typeface="Calibri" pitchFamily="34" charset="-122"/>
                 <a:cs typeface="Calibri" pitchFamily="34" charset="-120"/>
               </a:rPr>
-              <a:t>RLS filters, calculation-group logic and M transformation steps are counted and named but not interpreted. Multi-user identity is absent; a shared token is not a person, and the log says so.</a:t>
+              <a:t>No write path back into Power BI — Concordance reads and reports, it never edits a model. Report-page usage is outside the semantic layer, so a measure no other measure uses cannot be proven unused.</a:t>
             </a:r>
             <a:endParaRPr lang="en-US" sz="1200" dirty="0"/>
           </a:p>
@@ -2876,7 +2876,7 @@
                 <a:ea typeface="Calibri" pitchFamily="34" charset="-122"/>
                 <a:cs typeface="Calibri" pitchFamily="34" charset="-120"/>
               </a:rPr>
-              <a:t>Lexer-based canonicalisation, a real AST for SQL, 531 tests, no regex</a:t>
+              <a:t>Lexer-based canonicalisation, a real AST for SQL, 797 tests, no regex</a:t>
             </a:r>
             <a:endParaRPr lang="en-US" sz="1250" dirty="0"/>
           </a:p>
@@ -3761,7 +3761,7 @@
                 <a:ea typeface="Calibri" pitchFamily="34" charset="-122"/>
                 <a:cs typeface="Calibri" pitchFamily="34" charset="-120"/>
               </a:rPr>
-              <a:t>one extraction, four things that stay true afterwards</a:t>
+              <a:t>one extraction, five things that stay true afterwards</a:t>
             </a:r>
             <a:endParaRPr lang="en-US" sz="1400" dirty="0"/>
           </a:p>
@@ -3775,8 +3775,8 @@
         </p:nvSpPr>
         <p:spPr>
           <a:xfrm>
-            <a:off x="640080" y="1828800"/>
-            <a:ext cx="384048" cy="384048"/>
+            <a:off x="640080" y="1810512"/>
+            <a:ext cx="347472" cy="347472"/>
           </a:xfrm>
           <a:prstGeom prst="ellipse">
             <a:avLst/>
@@ -3795,8 +3795,8 @@
         </p:nvSpPr>
         <p:spPr>
           <a:xfrm>
-            <a:off x="640080" y="1828800"/>
-            <a:ext cx="384048" cy="384048"/>
+            <a:off x="640080" y="1810512"/>
+            <a:ext cx="347472" cy="347472"/>
           </a:xfrm>
           <a:prstGeom prst="rect">
             <a:avLst/>
@@ -3812,15 +3812,54 @@
               <a:buNone/>
             </a:pPr>
             <a:r>
+              <a:rPr lang="en-US" sz="1300" b="1" dirty="0">
+                <a:solidFill>
+                  <a:srgbClr val="FFFFFF"/>
+                </a:solidFill>
+                <a:latin typeface="Calibri" pitchFamily="34" charset="0"/>
+                <a:ea typeface="Calibri" pitchFamily="34" charset="-122"/>
+                <a:cs typeface="Calibri" pitchFamily="34" charset="-120"/>
+              </a:rPr>
+              <a:t>1</a:t>
+            </a:r>
+            <a:endParaRPr lang="en-US" sz="1300" dirty="0"/>
+          </a:p>
+        </p:txBody>
+      </p:sp>
+      <p:sp>
+        <p:nvSpPr>
+          <p:cNvPr id="6" name="Text 4"/>
+          <p:cNvSpPr/>
+          <p:nvPr/>
+        </p:nvSpPr>
+        <p:spPr>
+          <a:xfrm>
+            <a:off x="1170432" y="1764792"/>
+            <a:ext cx="4937760" cy="310896"/>
+          </a:xfrm>
+          <a:prstGeom prst="rect">
+            <a:avLst/>
+          </a:prstGeom>
+          <a:noFill/>
+          <a:ln/>
+        </p:spPr>
+        <p:txBody>
+          <a:bodyPr wrap="square" lIns="0" tIns="0" rIns="0" bIns="0" rtlCol="0" anchor="ctr"/>
+          <a:lstStyle/>
+          <a:p>
+            <a:pPr indent="0" marL="0">
+              <a:buNone/>
+            </a:pPr>
+            <a:r>
               <a:rPr lang="en-US" sz="1400" b="1" dirty="0">
                 <a:solidFill>
-                  <a:srgbClr val="FFFFFF"/>
-                </a:solidFill>
-                <a:latin typeface="Calibri" pitchFamily="34" charset="0"/>
-                <a:ea typeface="Calibri" pitchFamily="34" charset="-122"/>
-                <a:cs typeface="Calibri" pitchFamily="34" charset="-120"/>
-              </a:rPr>
-              <a:t>1</a:t>
+                  <a:srgbClr val="14202B"/>
+                </a:solidFill>
+                <a:latin typeface="Calibri" pitchFamily="34" charset="0"/>
+                <a:ea typeface="Calibri" pitchFamily="34" charset="-122"/>
+                <a:cs typeface="Calibri" pitchFamily="34" charset="-120"/>
+              </a:rPr>
+              <a:t>Derives the BRD and FRD</a:t>
             </a:r>
             <a:endParaRPr lang="en-US" sz="1400" dirty="0"/>
           </a:p>
@@ -3828,69 +3867,30 @@
       </p:sp>
       <p:sp>
         <p:nvSpPr>
-          <p:cNvPr id="6" name="Text 4"/>
-          <p:cNvSpPr/>
-          <p:nvPr/>
-        </p:nvSpPr>
-        <p:spPr>
-          <a:xfrm>
-            <a:off x="1207008" y="1783080"/>
-            <a:ext cx="4937760" cy="365760"/>
-          </a:xfrm>
-          <a:prstGeom prst="rect">
-            <a:avLst/>
-          </a:prstGeom>
-          <a:noFill/>
-          <a:ln/>
-        </p:spPr>
-        <p:txBody>
-          <a:bodyPr wrap="square" lIns="0" tIns="0" rIns="0" bIns="0" rtlCol="0" anchor="ctr"/>
-          <a:lstStyle/>
-          <a:p>
-            <a:pPr indent="0" marL="0">
-              <a:buNone/>
-            </a:pPr>
-            <a:r>
-              <a:rPr lang="en-US" sz="1500" b="1" dirty="0">
-                <a:solidFill>
-                  <a:srgbClr val="14202B"/>
-                </a:solidFill>
-                <a:latin typeface="Calibri" pitchFamily="34" charset="0"/>
-                <a:ea typeface="Calibri" pitchFamily="34" charset="-122"/>
-                <a:cs typeface="Calibri" pitchFamily="34" charset="-120"/>
-              </a:rPr>
-              <a:t>Derives the BRD and FRD</a:t>
-            </a:r>
-            <a:endParaRPr lang="en-US" sz="1500" dirty="0"/>
-          </a:p>
-        </p:txBody>
-      </p:sp>
-      <p:sp>
-        <p:nvSpPr>
           <p:cNvPr id="7" name="Text 5"/>
           <p:cNvSpPr/>
           <p:nvPr/>
         </p:nvSpPr>
         <p:spPr>
           <a:xfrm>
-            <a:off x="1207008" y="2130552"/>
-            <a:ext cx="5120640" cy="566928"/>
-          </a:xfrm>
-          <a:prstGeom prst="rect">
-            <a:avLst/>
-          </a:prstGeom>
-          <a:noFill/>
-          <a:ln/>
-        </p:spPr>
-        <p:txBody>
-          <a:bodyPr wrap="square" lIns="0" tIns="0" rIns="0" bIns="0" rtlCol="0" anchor="ctr"/>
-          <a:lstStyle/>
-          <a:p>
-            <a:pPr indent="0" marL="0">
-              <a:buNone/>
-            </a:pPr>
-            <a:r>
-              <a:rPr lang="en-US" sz="1200" dirty="0">
+            <a:off x="1170432" y="2057400"/>
+            <a:ext cx="5212080" cy="512064"/>
+          </a:xfrm>
+          <a:prstGeom prst="rect">
+            <a:avLst/>
+          </a:prstGeom>
+          <a:noFill/>
+          <a:ln/>
+        </p:spPr>
+        <p:txBody>
+          <a:bodyPr wrap="square" lIns="0" tIns="0" rIns="0" bIns="0" rtlCol="0" anchor="ctr"/>
+          <a:lstStyle/>
+          <a:p>
+            <a:pPr indent="0" marL="0">
+              <a:buNone/>
+            </a:pPr>
+            <a:r>
+              <a:rPr lang="en-US" sz="1150" dirty="0">
                 <a:solidFill>
                   <a:srgbClr val="5C6B74"/>
                 </a:solidFill>
@@ -3900,7 +3900,7 @@
               </a:rPr>
               <a:t>Every statement comes from an object in the model, and shows which one.</a:t>
             </a:r>
-            <a:endParaRPr lang="en-US" sz="1200" dirty="0"/>
+            <a:endParaRPr lang="en-US" sz="1150" dirty="0"/>
           </a:p>
         </p:txBody>
       </p:sp>
@@ -3912,8 +3912,8 @@
         </p:nvSpPr>
         <p:spPr>
           <a:xfrm>
-            <a:off x="640080" y="2944368"/>
-            <a:ext cx="384048" cy="384048"/>
+            <a:off x="640080" y="2715768"/>
+            <a:ext cx="347472" cy="347472"/>
           </a:xfrm>
           <a:prstGeom prst="ellipse">
             <a:avLst/>
@@ -3932,8 +3932,8 @@
         </p:nvSpPr>
         <p:spPr>
           <a:xfrm>
-            <a:off x="640080" y="2944368"/>
-            <a:ext cx="384048" cy="384048"/>
+            <a:off x="640080" y="2715768"/>
+            <a:ext cx="347472" cy="347472"/>
           </a:xfrm>
           <a:prstGeom prst="rect">
             <a:avLst/>
@@ -3949,15 +3949,54 @@
               <a:buNone/>
             </a:pPr>
             <a:r>
+              <a:rPr lang="en-US" sz="1300" b="1" dirty="0">
+                <a:solidFill>
+                  <a:srgbClr val="FFFFFF"/>
+                </a:solidFill>
+                <a:latin typeface="Calibri" pitchFamily="34" charset="0"/>
+                <a:ea typeface="Calibri" pitchFamily="34" charset="-122"/>
+                <a:cs typeface="Calibri" pitchFamily="34" charset="-120"/>
+              </a:rPr>
+              <a:t>2</a:t>
+            </a:r>
+            <a:endParaRPr lang="en-US" sz="1300" dirty="0"/>
+          </a:p>
+        </p:txBody>
+      </p:sp>
+      <p:sp>
+        <p:nvSpPr>
+          <p:cNvPr id="10" name="Text 8"/>
+          <p:cNvSpPr/>
+          <p:nvPr/>
+        </p:nvSpPr>
+        <p:spPr>
+          <a:xfrm>
+            <a:off x="1170432" y="2670048"/>
+            <a:ext cx="4937760" cy="310896"/>
+          </a:xfrm>
+          <a:prstGeom prst="rect">
+            <a:avLst/>
+          </a:prstGeom>
+          <a:noFill/>
+          <a:ln/>
+        </p:spPr>
+        <p:txBody>
+          <a:bodyPr wrap="square" lIns="0" tIns="0" rIns="0" bIns="0" rtlCol="0" anchor="ctr"/>
+          <a:lstStyle/>
+          <a:p>
+            <a:pPr indent="0" marL="0">
+              <a:buNone/>
+            </a:pPr>
+            <a:r>
               <a:rPr lang="en-US" sz="1400" b="1" dirty="0">
                 <a:solidFill>
-                  <a:srgbClr val="FFFFFF"/>
-                </a:solidFill>
-                <a:latin typeface="Calibri" pitchFamily="34" charset="0"/>
-                <a:ea typeface="Calibri" pitchFamily="34" charset="-122"/>
-                <a:cs typeface="Calibri" pitchFamily="34" charset="-120"/>
-              </a:rPr>
-              <a:t>2</a:t>
+                  <a:srgbClr val="14202B"/>
+                </a:solidFill>
+                <a:latin typeface="Calibri" pitchFamily="34" charset="0"/>
+                <a:ea typeface="Calibri" pitchFamily="34" charset="-122"/>
+                <a:cs typeface="Calibri" pitchFamily="34" charset="-120"/>
+              </a:rPr>
+              <a:t>Fingerprints the logic</a:t>
             </a:r>
             <a:endParaRPr lang="en-US" sz="1400" dirty="0"/>
           </a:p>
@@ -3965,69 +4004,30 @@
       </p:sp>
       <p:sp>
         <p:nvSpPr>
-          <p:cNvPr id="10" name="Text 8"/>
-          <p:cNvSpPr/>
-          <p:nvPr/>
-        </p:nvSpPr>
-        <p:spPr>
-          <a:xfrm>
-            <a:off x="1207008" y="2898648"/>
-            <a:ext cx="4937760" cy="365760"/>
-          </a:xfrm>
-          <a:prstGeom prst="rect">
-            <a:avLst/>
-          </a:prstGeom>
-          <a:noFill/>
-          <a:ln/>
-        </p:spPr>
-        <p:txBody>
-          <a:bodyPr wrap="square" lIns="0" tIns="0" rIns="0" bIns="0" rtlCol="0" anchor="ctr"/>
-          <a:lstStyle/>
-          <a:p>
-            <a:pPr indent="0" marL="0">
-              <a:buNone/>
-            </a:pPr>
-            <a:r>
-              <a:rPr lang="en-US" sz="1500" b="1" dirty="0">
-                <a:solidFill>
-                  <a:srgbClr val="14202B"/>
-                </a:solidFill>
-                <a:latin typeface="Calibri" pitchFamily="34" charset="0"/>
-                <a:ea typeface="Calibri" pitchFamily="34" charset="-122"/>
-                <a:cs typeface="Calibri" pitchFamily="34" charset="-120"/>
-              </a:rPr>
-              <a:t>Fingerprints the logic</a:t>
-            </a:r>
-            <a:endParaRPr lang="en-US" sz="1500" dirty="0"/>
-          </a:p>
-        </p:txBody>
-      </p:sp>
-      <p:sp>
-        <p:nvSpPr>
           <p:cNvPr id="11" name="Text 9"/>
           <p:cNvSpPr/>
           <p:nvPr/>
         </p:nvSpPr>
         <p:spPr>
           <a:xfrm>
-            <a:off x="1207008" y="3246120"/>
-            <a:ext cx="5120640" cy="566928"/>
-          </a:xfrm>
-          <a:prstGeom prst="rect">
-            <a:avLst/>
-          </a:prstGeom>
-          <a:noFill/>
-          <a:ln/>
-        </p:spPr>
-        <p:txBody>
-          <a:bodyPr wrap="square" lIns="0" tIns="0" rIns="0" bIns="0" rtlCol="0" anchor="ctr"/>
-          <a:lstStyle/>
-          <a:p>
-            <a:pPr indent="0" marL="0">
-              <a:buNone/>
-            </a:pPr>
-            <a:r>
-              <a:rPr lang="en-US" sz="1200" dirty="0">
+            <a:off x="1170432" y="2962656"/>
+            <a:ext cx="5212080" cy="512064"/>
+          </a:xfrm>
+          <a:prstGeom prst="rect">
+            <a:avLst/>
+          </a:prstGeom>
+          <a:noFill/>
+          <a:ln/>
+        </p:spPr>
+        <p:txBody>
+          <a:bodyPr wrap="square" lIns="0" tIns="0" rIns="0" bIns="0" rtlCol="0" anchor="ctr"/>
+          <a:lstStyle/>
+          <a:p>
+            <a:pPr indent="0" marL="0">
+              <a:buNone/>
+            </a:pPr>
+            <a:r>
+              <a:rPr lang="en-US" sz="1150" dirty="0">
                 <a:solidFill>
                   <a:srgbClr val="5C6B74"/>
                 </a:solidFill>
@@ -4037,7 +4037,7 @@
               </a:rPr>
               <a:t>Canonicalised DAX, hashed. Reformatting is silent; a changed filter is not.</a:t>
             </a:r>
-            <a:endParaRPr lang="en-US" sz="1200" dirty="0"/>
+            <a:endParaRPr lang="en-US" sz="1150" dirty="0"/>
           </a:p>
         </p:txBody>
       </p:sp>
@@ -4049,8 +4049,8 @@
         </p:nvSpPr>
         <p:spPr>
           <a:xfrm>
-            <a:off x="640080" y="4059936"/>
-            <a:ext cx="384048" cy="384048"/>
+            <a:off x="640080" y="3621024"/>
+            <a:ext cx="347472" cy="347472"/>
           </a:xfrm>
           <a:prstGeom prst="ellipse">
             <a:avLst/>
@@ -4069,8 +4069,8 @@
         </p:nvSpPr>
         <p:spPr>
           <a:xfrm>
-            <a:off x="640080" y="4059936"/>
-            <a:ext cx="384048" cy="384048"/>
+            <a:off x="640080" y="3621024"/>
+            <a:ext cx="347472" cy="347472"/>
           </a:xfrm>
           <a:prstGeom prst="rect">
             <a:avLst/>
@@ -4086,15 +4086,54 @@
               <a:buNone/>
             </a:pPr>
             <a:r>
+              <a:rPr lang="en-US" sz="1300" b="1" dirty="0">
+                <a:solidFill>
+                  <a:srgbClr val="FFFFFF"/>
+                </a:solidFill>
+                <a:latin typeface="Calibri" pitchFamily="34" charset="0"/>
+                <a:ea typeface="Calibri" pitchFamily="34" charset="-122"/>
+                <a:cs typeface="Calibri" pitchFamily="34" charset="-120"/>
+              </a:rPr>
+              <a:t>3</a:t>
+            </a:r>
+            <a:endParaRPr lang="en-US" sz="1300" dirty="0"/>
+          </a:p>
+        </p:txBody>
+      </p:sp>
+      <p:sp>
+        <p:nvSpPr>
+          <p:cNvPr id="14" name="Text 12"/>
+          <p:cNvSpPr/>
+          <p:nvPr/>
+        </p:nvSpPr>
+        <p:spPr>
+          <a:xfrm>
+            <a:off x="1170432" y="3575304"/>
+            <a:ext cx="4937760" cy="310896"/>
+          </a:xfrm>
+          <a:prstGeom prst="rect">
+            <a:avLst/>
+          </a:prstGeom>
+          <a:noFill/>
+          <a:ln/>
+        </p:spPr>
+        <p:txBody>
+          <a:bodyPr wrap="square" lIns="0" tIns="0" rIns="0" bIns="0" rtlCol="0" anchor="ctr"/>
+          <a:lstStyle/>
+          <a:p>
+            <a:pPr indent="0" marL="0">
+              <a:buNone/>
+            </a:pPr>
+            <a:r>
               <a:rPr lang="en-US" sz="1400" b="1" dirty="0">
                 <a:solidFill>
-                  <a:srgbClr val="FFFFFF"/>
-                </a:solidFill>
-                <a:latin typeface="Calibri" pitchFamily="34" charset="0"/>
-                <a:ea typeface="Calibri" pitchFamily="34" charset="-122"/>
-                <a:cs typeface="Calibri" pitchFamily="34" charset="-120"/>
-              </a:rPr>
-              <a:t>3</a:t>
+                  <a:srgbClr val="14202B"/>
+                </a:solidFill>
+                <a:latin typeface="Calibri" pitchFamily="34" charset="0"/>
+                <a:ea typeface="Calibri" pitchFamily="34" charset="-122"/>
+                <a:cs typeface="Calibri" pitchFamily="34" charset="-120"/>
+              </a:rPr>
+              <a:t>Detects drift between versions</a:t>
             </a:r>
             <a:endParaRPr lang="en-US" sz="1400" dirty="0"/>
           </a:p>
@@ -4102,69 +4141,30 @@
       </p:sp>
       <p:sp>
         <p:nvSpPr>
-          <p:cNvPr id="14" name="Text 12"/>
-          <p:cNvSpPr/>
-          <p:nvPr/>
-        </p:nvSpPr>
-        <p:spPr>
-          <a:xfrm>
-            <a:off x="1207008" y="4014216"/>
-            <a:ext cx="4937760" cy="365760"/>
-          </a:xfrm>
-          <a:prstGeom prst="rect">
-            <a:avLst/>
-          </a:prstGeom>
-          <a:noFill/>
-          <a:ln/>
-        </p:spPr>
-        <p:txBody>
-          <a:bodyPr wrap="square" lIns="0" tIns="0" rIns="0" bIns="0" rtlCol="0" anchor="ctr"/>
-          <a:lstStyle/>
-          <a:p>
-            <a:pPr indent="0" marL="0">
-              <a:buNone/>
-            </a:pPr>
-            <a:r>
-              <a:rPr lang="en-US" sz="1500" b="1" dirty="0">
-                <a:solidFill>
-                  <a:srgbClr val="14202B"/>
-                </a:solidFill>
-                <a:latin typeface="Calibri" pitchFamily="34" charset="0"/>
-                <a:ea typeface="Calibri" pitchFamily="34" charset="-122"/>
-                <a:cs typeface="Calibri" pitchFamily="34" charset="-120"/>
-              </a:rPr>
-              <a:t>Detects drift between versions</a:t>
-            </a:r>
-            <a:endParaRPr lang="en-US" sz="1500" dirty="0"/>
-          </a:p>
-        </p:txBody>
-      </p:sp>
-      <p:sp>
-        <p:nvSpPr>
           <p:cNvPr id="15" name="Text 13"/>
           <p:cNvSpPr/>
           <p:nvPr/>
         </p:nvSpPr>
         <p:spPr>
           <a:xfrm>
-            <a:off x="1207008" y="4361688"/>
-            <a:ext cx="5120640" cy="566928"/>
-          </a:xfrm>
-          <a:prstGeom prst="rect">
-            <a:avLst/>
-          </a:prstGeom>
-          <a:noFill/>
-          <a:ln/>
-        </p:spPr>
-        <p:txBody>
-          <a:bodyPr wrap="square" lIns="0" tIns="0" rIns="0" bIns="0" rtlCol="0" anchor="ctr"/>
-          <a:lstStyle/>
-          <a:p>
-            <a:pPr indent="0" marL="0">
-              <a:buNone/>
-            </a:pPr>
-            <a:r>
-              <a:rPr lang="en-US" sz="1200" dirty="0">
+            <a:off x="1170432" y="3867912"/>
+            <a:ext cx="5212080" cy="512064"/>
+          </a:xfrm>
+          <a:prstGeom prst="rect">
+            <a:avLst/>
+          </a:prstGeom>
+          <a:noFill/>
+          <a:ln/>
+        </p:spPr>
+        <p:txBody>
+          <a:bodyPr wrap="square" lIns="0" tIns="0" rIns="0" bIns="0" rtlCol="0" anchor="ctr"/>
+          <a:lstStyle/>
+          <a:p>
+            <a:pPr indent="0" marL="0">
+              <a:buNone/>
+            </a:pPr>
+            <a:r>
+              <a:rPr lang="en-US" sz="1150" dirty="0">
                 <a:solidFill>
                   <a:srgbClr val="5C6B74"/>
                 </a:solidFill>
@@ -4174,7 +4174,7 @@
               </a:rPr>
               <a:t>Names the requirements a change puts in question, and the ones it provably does not.</a:t>
             </a:r>
-            <a:endParaRPr lang="en-US" sz="1200" dirty="0"/>
+            <a:endParaRPr lang="en-US" sz="1150" dirty="0"/>
           </a:p>
         </p:txBody>
       </p:sp>
@@ -4186,8 +4186,8 @@
         </p:nvSpPr>
         <p:spPr>
           <a:xfrm>
-            <a:off x="640080" y="5175504"/>
-            <a:ext cx="384048" cy="384048"/>
+            <a:off x="640080" y="4526280"/>
+            <a:ext cx="347472" cy="347472"/>
           </a:xfrm>
           <a:prstGeom prst="ellipse">
             <a:avLst/>
@@ -4206,8 +4206,8 @@
         </p:nvSpPr>
         <p:spPr>
           <a:xfrm>
-            <a:off x="640080" y="5175504"/>
-            <a:ext cx="384048" cy="384048"/>
+            <a:off x="640080" y="4526280"/>
+            <a:ext cx="347472" cy="347472"/>
           </a:xfrm>
           <a:prstGeom prst="rect">
             <a:avLst/>
@@ -4223,15 +4223,191 @@
               <a:buNone/>
             </a:pPr>
             <a:r>
+              <a:rPr lang="en-US" sz="1300" b="1" dirty="0">
+                <a:solidFill>
+                  <a:srgbClr val="FFFFFF"/>
+                </a:solidFill>
+                <a:latin typeface="Calibri" pitchFamily="34" charset="0"/>
+                <a:ea typeface="Calibri" pitchFamily="34" charset="-122"/>
+                <a:cs typeface="Calibri" pitchFamily="34" charset="-120"/>
+              </a:rPr>
+              <a:t>4</a:t>
+            </a:r>
+            <a:endParaRPr lang="en-US" sz="1300" dirty="0"/>
+          </a:p>
+        </p:txBody>
+      </p:sp>
+      <p:sp>
+        <p:nvSpPr>
+          <p:cNvPr id="18" name="Text 16"/>
+          <p:cNvSpPr/>
+          <p:nvPr/>
+        </p:nvSpPr>
+        <p:spPr>
+          <a:xfrm>
+            <a:off x="1170432" y="4480560"/>
+            <a:ext cx="4937760" cy="310896"/>
+          </a:xfrm>
+          <a:prstGeom prst="rect">
+            <a:avLst/>
+          </a:prstGeom>
+          <a:noFill/>
+          <a:ln/>
+        </p:spPr>
+        <p:txBody>
+          <a:bodyPr wrap="square" lIns="0" tIns="0" rIns="0" bIns="0" rtlCol="0" anchor="ctr"/>
+          <a:lstStyle/>
+          <a:p>
+            <a:pPr indent="0" marL="0">
+              <a:buNone/>
+            </a:pPr>
+            <a:r>
               <a:rPr lang="en-US" sz="1400" b="1" dirty="0">
                 <a:solidFill>
+                  <a:srgbClr val="14202B"/>
+                </a:solidFill>
+                <a:latin typeface="Calibri" pitchFamily="34" charset="0"/>
+                <a:ea typeface="Calibri" pitchFamily="34" charset="-122"/>
+                <a:cs typeface="Calibri" pitchFamily="34" charset="-120"/>
+              </a:rPr>
+              <a:t>Reconciles across platforms</a:t>
+            </a:r>
+            <a:endParaRPr lang="en-US" sz="1400" dirty="0"/>
+          </a:p>
+        </p:txBody>
+      </p:sp>
+      <p:sp>
+        <p:nvSpPr>
+          <p:cNvPr id="19" name="Text 17"/>
+          <p:cNvSpPr/>
+          <p:nvPr/>
+        </p:nvSpPr>
+        <p:spPr>
+          <a:xfrm>
+            <a:off x="1170432" y="4773168"/>
+            <a:ext cx="5212080" cy="512064"/>
+          </a:xfrm>
+          <a:prstGeom prst="rect">
+            <a:avLst/>
+          </a:prstGeom>
+          <a:noFill/>
+          <a:ln/>
+        </p:spPr>
+        <p:txBody>
+          <a:bodyPr wrap="square" lIns="0" tIns="0" rIns="0" bIns="0" rtlCol="0" anchor="ctr"/>
+          <a:lstStyle/>
+          <a:p>
+            <a:pPr indent="0" marL="0">
+              <a:buNone/>
+            </a:pPr>
+            <a:r>
+              <a:rPr lang="en-US" sz="1150" dirty="0">
+                <a:solidFill>
+                  <a:srgbClr val="5C6B74"/>
+                </a:solidFill>
+                <a:latin typeface="Calibri" pitchFamily="34" charset="0"/>
+                <a:ea typeface="Calibri" pitchFamily="34" charset="-122"/>
+                <a:cs typeface="Calibri" pitchFamily="34" charset="-120"/>
+              </a:rPr>
+              <a:t>Compares what a DAX measure and a warehouse view each read, and reports the difference.</a:t>
+            </a:r>
+            <a:endParaRPr lang="en-US" sz="1150" dirty="0"/>
+          </a:p>
+        </p:txBody>
+      </p:sp>
+      <p:sp>
+        <p:nvSpPr>
+          <p:cNvPr id="20" name="Shape 18"/>
+          <p:cNvSpPr/>
+          <p:nvPr/>
+        </p:nvSpPr>
+        <p:spPr>
+          <a:xfrm>
+            <a:off x="640080" y="5431536"/>
+            <a:ext cx="347472" cy="347472"/>
+          </a:xfrm>
+          <a:prstGeom prst="ellipse">
+            <a:avLst/>
+          </a:prstGeom>
+          <a:solidFill>
+            <a:srgbClr val="2C5985"/>
+          </a:solidFill>
+          <a:ln/>
+        </p:spPr>
+      </p:sp>
+      <p:sp>
+        <p:nvSpPr>
+          <p:cNvPr id="21" name="Text 19"/>
+          <p:cNvSpPr/>
+          <p:nvPr/>
+        </p:nvSpPr>
+        <p:spPr>
+          <a:xfrm>
+            <a:off x="640080" y="5431536"/>
+            <a:ext cx="347472" cy="347472"/>
+          </a:xfrm>
+          <a:prstGeom prst="rect">
+            <a:avLst/>
+          </a:prstGeom>
+          <a:noFill/>
+          <a:ln/>
+        </p:spPr>
+        <p:txBody>
+          <a:bodyPr wrap="square" lIns="0" tIns="0" rIns="0" bIns="0" rtlCol="0" anchor="ctr"/>
+          <a:lstStyle/>
+          <a:p>
+            <a:pPr algn="ctr" indent="0" marL="0">
+              <a:buNone/>
+            </a:pPr>
+            <a:r>
+              <a:rPr lang="en-US" sz="1300" b="1" dirty="0">
+                <a:solidFill>
                   <a:srgbClr val="FFFFFF"/>
                 </a:solidFill>
                 <a:latin typeface="Calibri" pitchFamily="34" charset="0"/>
                 <a:ea typeface="Calibri" pitchFamily="34" charset="-122"/>
                 <a:cs typeface="Calibri" pitchFamily="34" charset="-120"/>
               </a:rPr>
-              <a:t>4</a:t>
+              <a:t>5</a:t>
+            </a:r>
+            <a:endParaRPr lang="en-US" sz="1300" dirty="0"/>
+          </a:p>
+        </p:txBody>
+      </p:sp>
+      <p:sp>
+        <p:nvSpPr>
+          <p:cNvPr id="22" name="Text 20"/>
+          <p:cNvSpPr/>
+          <p:nvPr/>
+        </p:nvSpPr>
+        <p:spPr>
+          <a:xfrm>
+            <a:off x="1170432" y="5385816"/>
+            <a:ext cx="4937760" cy="310896"/>
+          </a:xfrm>
+          <a:prstGeom prst="rect">
+            <a:avLst/>
+          </a:prstGeom>
+          <a:noFill/>
+          <a:ln/>
+        </p:spPr>
+        <p:txBody>
+          <a:bodyPr wrap="square" lIns="0" tIns="0" rIns="0" bIns="0" rtlCol="0" anchor="ctr"/>
+          <a:lstStyle/>
+          <a:p>
+            <a:pPr indent="0" marL="0">
+              <a:buNone/>
+            </a:pPr>
+            <a:r>
+              <a:rPr lang="en-US" sz="1400" b="1" dirty="0">
+                <a:solidFill>
+                  <a:srgbClr val="14202B"/>
+                </a:solidFill>
+                <a:latin typeface="Calibri" pitchFamily="34" charset="0"/>
+                <a:ea typeface="Calibri" pitchFamily="34" charset="-122"/>
+                <a:cs typeface="Calibri" pitchFamily="34" charset="-120"/>
+              </a:rPr>
+              <a:t>Answers questions about the model</a:t>
             </a:r>
             <a:endParaRPr lang="en-US" sz="1400" dirty="0"/>
           </a:p>
@@ -4239,69 +4415,30 @@
       </p:sp>
       <p:sp>
         <p:nvSpPr>
-          <p:cNvPr id="18" name="Text 16"/>
-          <p:cNvSpPr/>
-          <p:nvPr/>
-        </p:nvSpPr>
-        <p:spPr>
-          <a:xfrm>
-            <a:off x="1207008" y="5129784"/>
-            <a:ext cx="4937760" cy="365760"/>
-          </a:xfrm>
-          <a:prstGeom prst="rect">
-            <a:avLst/>
-          </a:prstGeom>
-          <a:noFill/>
-          <a:ln/>
-        </p:spPr>
-        <p:txBody>
-          <a:bodyPr wrap="square" lIns="0" tIns="0" rIns="0" bIns="0" rtlCol="0" anchor="ctr"/>
-          <a:lstStyle/>
-          <a:p>
-            <a:pPr indent="0" marL="0">
-              <a:buNone/>
-            </a:pPr>
-            <a:r>
-              <a:rPr lang="en-US" sz="1500" b="1" dirty="0">
-                <a:solidFill>
-                  <a:srgbClr val="14202B"/>
-                </a:solidFill>
-                <a:latin typeface="Calibri" pitchFamily="34" charset="0"/>
-                <a:ea typeface="Calibri" pitchFamily="34" charset="-122"/>
-                <a:cs typeface="Calibri" pitchFamily="34" charset="-120"/>
-              </a:rPr>
-              <a:t>Reconciles across platforms</a:t>
-            </a:r>
-            <a:endParaRPr lang="en-US" sz="1500" dirty="0"/>
-          </a:p>
-        </p:txBody>
-      </p:sp>
-      <p:sp>
-        <p:nvSpPr>
-          <p:cNvPr id="19" name="Text 17"/>
-          <p:cNvSpPr/>
-          <p:nvPr/>
-        </p:nvSpPr>
-        <p:spPr>
-          <a:xfrm>
-            <a:off x="1207008" y="5477256"/>
-            <a:ext cx="5120640" cy="566928"/>
-          </a:xfrm>
-          <a:prstGeom prst="rect">
-            <a:avLst/>
-          </a:prstGeom>
-          <a:noFill/>
-          <a:ln/>
-        </p:spPr>
-        <p:txBody>
-          <a:bodyPr wrap="square" lIns="0" tIns="0" rIns="0" bIns="0" rtlCol="0" anchor="ctr"/>
-          <a:lstStyle/>
-          <a:p>
-            <a:pPr indent="0" marL="0">
-              <a:buNone/>
-            </a:pPr>
-            <a:r>
-              <a:rPr lang="en-US" sz="1200" dirty="0">
+          <p:cNvPr id="23" name="Text 21"/>
+          <p:cNvSpPr/>
+          <p:nvPr/>
+        </p:nvSpPr>
+        <p:spPr>
+          <a:xfrm>
+            <a:off x="1170432" y="5678424"/>
+            <a:ext cx="5212080" cy="512064"/>
+          </a:xfrm>
+          <a:prstGeom prst="rect">
+            <a:avLst/>
+          </a:prstGeom>
+          <a:noFill/>
+          <a:ln/>
+        </p:spPr>
+        <p:txBody>
+          <a:bodyPr wrap="square" lIns="0" tIns="0" rIns="0" bIns="0" rtlCol="0" anchor="ctr"/>
+          <a:lstStyle/>
+          <a:p>
+            <a:pPr indent="0" marL="0">
+              <a:buNone/>
+            </a:pPr>
+            <a:r>
+              <a:rPr lang="en-US" sz="1150" dirty="0">
                 <a:solidFill>
                   <a:srgbClr val="5C6B74"/>
                 </a:solidFill>
@@ -4309,15 +4446,15 @@
                 <a:ea typeface="Calibri" pitchFamily="34" charset="-122"/>
                 <a:cs typeface="Calibri" pitchFamily="34" charset="-120"/>
               </a:rPr>
-              <a:t>Compares what a DAX measure and a warehouse view each read, and reports the difference.</a:t>
-            </a:r>
-            <a:endParaRPr lang="en-US" sz="1200" dirty="0"/>
-          </a:p>
-        </p:txBody>
-      </p:sp>
-      <p:sp>
-        <p:nvSpPr>
-          <p:cNvPr id="20" name="Shape 18"/>
+              <a:t>Fifteen read-only tools over the graph. Every answer is a real tool call, never recall.</a:t>
+            </a:r>
+            <a:endParaRPr lang="en-US" sz="1150" dirty="0"/>
+          </a:p>
+        </p:txBody>
+      </p:sp>
+      <p:sp>
+        <p:nvSpPr>
+          <p:cNvPr id="24" name="Shape 22"/>
           <p:cNvSpPr/>
           <p:nvPr/>
         </p:nvSpPr>
@@ -4344,7 +4481,7 @@
       </p:sp>
       <p:sp>
         <p:nvSpPr>
-          <p:cNvPr id="21" name="Text 19"/>
+          <p:cNvPr id="25" name="Text 23"/>
           <p:cNvSpPr/>
           <p:nvPr/>
         </p:nvSpPr>
@@ -4383,7 +4520,7 @@
       </p:sp>
       <p:sp>
         <p:nvSpPr>
-          <p:cNvPr id="22" name="Text 20"/>
+          <p:cNvPr id="26" name="Text 24"/>
           <p:cNvSpPr/>
           <p:nvPr/>
         </p:nvSpPr>
@@ -4422,7 +4559,7 @@
       </p:sp>
       <p:sp>
         <p:nvSpPr>
-          <p:cNvPr id="23" name="Text 21"/>
+          <p:cNvPr id="27" name="Text 25"/>
           <p:cNvSpPr/>
           <p:nvPr/>
         </p:nvSpPr>
@@ -4464,7 +4601,7 @@
       </p:sp>
       <p:sp>
         <p:nvSpPr>
-          <p:cNvPr id="24" name="Text 22"/>
+          <p:cNvPr id="28" name="Text 26"/>
           <p:cNvSpPr/>
           <p:nvPr/>
         </p:nvSpPr>
@@ -4503,7 +4640,7 @@
       </p:sp>
       <p:sp>
         <p:nvSpPr>
-          <p:cNvPr id="25" name="Text 23"/>
+          <p:cNvPr id="29" name="Text 27"/>
           <p:cNvSpPr/>
           <p:nvPr/>
         </p:nvSpPr>
@@ -4542,7 +4679,7 @@
       </p:sp>
       <p:sp>
         <p:nvSpPr>
-          <p:cNvPr id="26" name="Text 24"/>
+          <p:cNvPr id="30" name="Text 28"/>
           <p:cNvSpPr/>
           <p:nvPr/>
         </p:nvSpPr>
@@ -4581,7 +4718,7 @@
       </p:sp>
       <p:sp>
         <p:nvSpPr>
-          <p:cNvPr id="27" name="Text 25"/>
+          <p:cNvPr id="31" name="Text 29"/>
           <p:cNvSpPr/>
           <p:nvPr/>
         </p:nvSpPr>
@@ -4722,7 +4859,7 @@
                 <a:ea typeface="Calibri" pitchFamily="34" charset="-122"/>
                 <a:cs typeface="Calibri" pitchFamily="34" charset="-120"/>
               </a:rPr>
-              <a:t>one pipeline, six real models, two Power BI formats</a:t>
+              <a:t>one pipeline, seven real models, two Power BI formats</a:t>
             </a:r>
             <a:endParaRPr lang="en-US" sz="1400" dirty="0"/>
           </a:p>
@@ -5466,7 +5603,7 @@
                 <a:ea typeface="Cambria" pitchFamily="34" charset="-122"/>
                 <a:cs typeface="Cambria" pitchFamily="34" charset="-120"/>
               </a:rPr>
-              <a:t>9,323</a:t>
+              <a:t>14,572</a:t>
             </a:r>
             <a:endParaRPr lang="en-US" sz="3400" dirty="0"/>
           </a:p>
@@ -5571,7 +5708,7 @@
                 <a:ea typeface="Cambria" pitchFamily="34" charset="-122"/>
                 <a:cs typeface="Cambria" pitchFamily="34" charset="-120"/>
               </a:rPr>
-              <a:t>3,948</a:t>
+              <a:t>5,901</a:t>
             </a:r>
             <a:endParaRPr lang="en-US" sz="3400" dirty="0"/>
           </a:p>
@@ -5676,7 +5813,7 @@
                 <a:ea typeface="Cambria" pitchFamily="34" charset="-122"/>
                 <a:cs typeface="Cambria" pitchFamily="34" charset="-120"/>
               </a:rPr>
-              <a:t>531</a:t>
+              <a:t>797</a:t>
             </a:r>
             <a:endParaRPr lang="en-US" sz="3400" dirty="0"/>
           </a:p>
@@ -7509,7 +7646,7 @@
                 <a:ea typeface="Calibri" pitchFamily="34" charset="-122"/>
                 <a:cs typeface="Calibri" pitchFamily="34" charset="-120"/>
               </a:rPr>
-              <a:t>QualityControl in Power BI against the same metrics in the warehouse</a:t>
+              <a:t>QualityControl in Power BI against the same metrics in the warehouse — run live against DuckDB</a:t>
             </a:r>
             <a:endParaRPr lang="en-US" sz="1400" dirty="0"/>
           </a:p>
@@ -8088,11 +8225,11 @@
         <p:spPr>
           <a:xfrm>
             <a:off x="640080" y="4709160"/>
-            <a:ext cx="10881360" cy="1234440"/>
+            <a:ext cx="10881360" cy="914400"/>
           </a:xfrm>
           <a:prstGeom prst="roundRect">
             <a:avLst>
-              <a:gd name="adj" fmla="val 2963"/>
+              <a:gd name="adj" fmla="val 4000"/>
             </a:avLst>
           </a:prstGeom>
           <a:solidFill>
@@ -8114,24 +8251,24 @@
         </p:nvSpPr>
         <p:spPr>
           <a:xfrm>
-            <a:off x="914400" y="4864608"/>
-            <a:ext cx="10058400" cy="320040"/>
-          </a:xfrm>
-          <a:prstGeom prst="rect">
-            <a:avLst/>
-          </a:prstGeom>
-          <a:noFill/>
-          <a:ln/>
-        </p:spPr>
-        <p:txBody>
-          <a:bodyPr wrap="square" lIns="0" tIns="0" rIns="0" bIns="0" rtlCol="0" anchor="ctr"/>
-          <a:lstStyle/>
-          <a:p>
-            <a:pPr indent="0" marL="0">
-              <a:buNone/>
-            </a:pPr>
-            <a:r>
-              <a:rPr lang="en-US" sz="1400" b="1" dirty="0">
+            <a:off x="914400" y="4828032"/>
+            <a:ext cx="10058400" cy="274320"/>
+          </a:xfrm>
+          <a:prstGeom prst="rect">
+            <a:avLst/>
+          </a:prstGeom>
+          <a:noFill/>
+          <a:ln/>
+        </p:spPr>
+        <p:txBody>
+          <a:bodyPr wrap="square" lIns="0" tIns="0" rIns="0" bIns="0" rtlCol="0" anchor="ctr"/>
+          <a:lstStyle/>
+          <a:p>
+            <a:pPr indent="0" marL="0">
+              <a:buNone/>
+            </a:pPr>
+            <a:r>
+              <a:rPr lang="en-US" sz="1350" b="1" dirty="0">
                 <a:solidFill>
                   <a:srgbClr val="14202B"/>
                 </a:solidFill>
@@ -8141,7 +8278,7 @@
               </a:rPr>
               <a:t>Three verdicts, not pass/fail.</a:t>
             </a:r>
-            <a:endParaRPr lang="en-US" sz="1400" dirty="0"/>
+            <a:endParaRPr lang="en-US" sz="1350" dirty="0"/>
           </a:p>
         </p:txBody>
       </p:sp>
@@ -8153,8 +8290,8 @@
         </p:nvSpPr>
         <p:spPr>
           <a:xfrm>
-            <a:off x="914400" y="5193792"/>
-            <a:ext cx="10058400" cy="640080"/>
+            <a:off x="914400" y="5120640"/>
+            <a:ext cx="10058400" cy="411480"/>
           </a:xfrm>
           <a:prstGeom prst="rect">
             <a:avLst/>
@@ -8168,12 +8305,12 @@
           <a:p>
             <a:pPr indent="0" marL="0">
               <a:lnSpc>
-                <a:spcPct val="115000"/>
+                <a:spcPct val="110000"/>
               </a:lnSpc>
               <a:buNone/>
             </a:pPr>
             <a:r>
-              <a:rPr lang="en-US" sz="1200" dirty="0">
+              <a:rPr lang="en-US" sz="1150" dirty="0">
                 <a:solidFill>
                   <a:srgbClr val="5C6B74"/>
                 </a:solidFill>
@@ -8181,15 +8318,357 @@
                 <a:ea typeface="Calibri" pitchFamily="34" charset="-122"/>
                 <a:cs typeface="Calibri" pitchFamily="34" charset="-120"/>
               </a:rPr>
-              <a:t>Deciding whether two arbitrary expressions in two languages compute the same number is undecidable in general. "Needs review" is not hedging — it is the honest answer for a difference that may or may not change the number, and collapsing it into either neighbour would misreport it.</a:t>
-            </a:r>
-            <a:endParaRPr lang="en-US" sz="1200" dirty="0"/>
+              <a:t>Deciding whether two arbitrary expressions in two languages compute the same number is undecidable in general. "Needs review" is the honest answer for a difference that may or may not change the number.</a:t>
+            </a:r>
+            <a:endParaRPr lang="en-US" sz="1150" dirty="0"/>
           </a:p>
         </p:txBody>
       </p:sp>
       <p:sp>
         <p:nvSpPr>
           <p:cNvPr id="23" name="Text 21"/>
+          <p:cNvSpPr/>
+          <p:nvPr/>
+        </p:nvSpPr>
+        <p:spPr>
+          <a:xfrm>
+            <a:off x="640080" y="5779008"/>
+            <a:ext cx="3200400" cy="274320"/>
+          </a:xfrm>
+          <a:prstGeom prst="rect">
+            <a:avLst/>
+          </a:prstGeom>
+          <a:noFill/>
+          <a:ln/>
+        </p:spPr>
+        <p:txBody>
+          <a:bodyPr wrap="square" lIns="0" tIns="0" rIns="0" bIns="0" rtlCol="0" anchor="ctr"/>
+          <a:lstStyle/>
+          <a:p>
+            <a:pPr indent="0" marL="0">
+              <a:buNone/>
+            </a:pPr>
+            <a:r>
+              <a:rPr lang="en-US" sz="1150" b="1" dirty="0">
+                <a:solidFill>
+                  <a:srgbClr val="14202B"/>
+                </a:solidFill>
+                <a:latin typeface="Calibri" pitchFamily="34" charset="0"/>
+                <a:ea typeface="Calibri" pitchFamily="34" charset="-122"/>
+                <a:cs typeface="Calibri" pitchFamily="34" charset="-120"/>
+              </a:rPr>
+              <a:t>Same extraction path, four more platforms:</a:t>
+            </a:r>
+            <a:endParaRPr lang="en-US" sz="1150" dirty="0"/>
+          </a:p>
+        </p:txBody>
+      </p:sp>
+      <p:sp>
+        <p:nvSpPr>
+          <p:cNvPr id="24" name="Shape 22"/>
+          <p:cNvSpPr/>
+          <p:nvPr/>
+        </p:nvSpPr>
+        <p:spPr>
+          <a:xfrm>
+            <a:off x="3977640" y="5760720"/>
+            <a:ext cx="1371600" cy="301752"/>
+          </a:xfrm>
+          <a:prstGeom prst="roundRect">
+            <a:avLst>
+              <a:gd name="adj" fmla="val 15152"/>
+            </a:avLst>
+          </a:prstGeom>
+          <a:solidFill>
+            <a:srgbClr val="DCE8F2"/>
+          </a:solidFill>
+          <a:ln w="9525">
+            <a:solidFill>
+              <a:srgbClr val="D3DBE0"/>
+            </a:solidFill>
+            <a:prstDash val="solid"/>
+          </a:ln>
+        </p:spPr>
+      </p:sp>
+      <p:sp>
+        <p:nvSpPr>
+          <p:cNvPr id="25" name="Text 23"/>
+          <p:cNvSpPr/>
+          <p:nvPr/>
+        </p:nvSpPr>
+        <p:spPr>
+          <a:xfrm>
+            <a:off x="3977640" y="5760720"/>
+            <a:ext cx="1371600" cy="301752"/>
+          </a:xfrm>
+          <a:prstGeom prst="rect">
+            <a:avLst/>
+          </a:prstGeom>
+          <a:noFill/>
+          <a:ln/>
+        </p:spPr>
+        <p:txBody>
+          <a:bodyPr wrap="square" lIns="0" tIns="0" rIns="0" bIns="0" rtlCol="0" anchor="ctr"/>
+          <a:lstStyle/>
+          <a:p>
+            <a:pPr algn="ctr" indent="0" marL="0">
+              <a:buNone/>
+            </a:pPr>
+            <a:r>
+              <a:rPr lang="en-US" sz="1050" dirty="0">
+                <a:solidFill>
+                  <a:srgbClr val="14202B"/>
+                </a:solidFill>
+                <a:latin typeface="Courier New" pitchFamily="34" charset="0"/>
+                <a:ea typeface="Courier New" pitchFamily="34" charset="-122"/>
+                <a:cs typeface="Courier New" pitchFamily="34" charset="-120"/>
+              </a:rPr>
+              <a:t>Snowflake</a:t>
+            </a:r>
+            <a:endParaRPr lang="en-US" sz="1050" dirty="0"/>
+          </a:p>
+        </p:txBody>
+      </p:sp>
+      <p:sp>
+        <p:nvSpPr>
+          <p:cNvPr id="26" name="Shape 24"/>
+          <p:cNvSpPr/>
+          <p:nvPr/>
+        </p:nvSpPr>
+        <p:spPr>
+          <a:xfrm>
+            <a:off x="5458968" y="5760720"/>
+            <a:ext cx="1371600" cy="301752"/>
+          </a:xfrm>
+          <a:prstGeom prst="roundRect">
+            <a:avLst>
+              <a:gd name="adj" fmla="val 15152"/>
+            </a:avLst>
+          </a:prstGeom>
+          <a:solidFill>
+            <a:srgbClr val="DCE8F2"/>
+          </a:solidFill>
+          <a:ln w="9525">
+            <a:solidFill>
+              <a:srgbClr val="D3DBE0"/>
+            </a:solidFill>
+            <a:prstDash val="solid"/>
+          </a:ln>
+        </p:spPr>
+      </p:sp>
+      <p:sp>
+        <p:nvSpPr>
+          <p:cNvPr id="27" name="Text 25"/>
+          <p:cNvSpPr/>
+          <p:nvPr/>
+        </p:nvSpPr>
+        <p:spPr>
+          <a:xfrm>
+            <a:off x="5458968" y="5760720"/>
+            <a:ext cx="1371600" cy="301752"/>
+          </a:xfrm>
+          <a:prstGeom prst="rect">
+            <a:avLst/>
+          </a:prstGeom>
+          <a:noFill/>
+          <a:ln/>
+        </p:spPr>
+        <p:txBody>
+          <a:bodyPr wrap="square" lIns="0" tIns="0" rIns="0" bIns="0" rtlCol="0" anchor="ctr"/>
+          <a:lstStyle/>
+          <a:p>
+            <a:pPr algn="ctr" indent="0" marL="0">
+              <a:buNone/>
+            </a:pPr>
+            <a:r>
+              <a:rPr lang="en-US" sz="1050" dirty="0">
+                <a:solidFill>
+                  <a:srgbClr val="14202B"/>
+                </a:solidFill>
+                <a:latin typeface="Courier New" pitchFamily="34" charset="0"/>
+                <a:ea typeface="Courier New" pitchFamily="34" charset="-122"/>
+                <a:cs typeface="Courier New" pitchFamily="34" charset="-120"/>
+              </a:rPr>
+              <a:t>Databricks</a:t>
+            </a:r>
+            <a:endParaRPr lang="en-US" sz="1050" dirty="0"/>
+          </a:p>
+        </p:txBody>
+      </p:sp>
+      <p:sp>
+        <p:nvSpPr>
+          <p:cNvPr id="28" name="Shape 26"/>
+          <p:cNvSpPr/>
+          <p:nvPr/>
+        </p:nvSpPr>
+        <p:spPr>
+          <a:xfrm>
+            <a:off x="6940296" y="5760720"/>
+            <a:ext cx="1371600" cy="301752"/>
+          </a:xfrm>
+          <a:prstGeom prst="roundRect">
+            <a:avLst>
+              <a:gd name="adj" fmla="val 15152"/>
+            </a:avLst>
+          </a:prstGeom>
+          <a:solidFill>
+            <a:srgbClr val="DCE8F2"/>
+          </a:solidFill>
+          <a:ln w="9525">
+            <a:solidFill>
+              <a:srgbClr val="D3DBE0"/>
+            </a:solidFill>
+            <a:prstDash val="solid"/>
+          </a:ln>
+        </p:spPr>
+      </p:sp>
+      <p:sp>
+        <p:nvSpPr>
+          <p:cNvPr id="29" name="Text 27"/>
+          <p:cNvSpPr/>
+          <p:nvPr/>
+        </p:nvSpPr>
+        <p:spPr>
+          <a:xfrm>
+            <a:off x="6940296" y="5760720"/>
+            <a:ext cx="1371600" cy="301752"/>
+          </a:xfrm>
+          <a:prstGeom prst="rect">
+            <a:avLst/>
+          </a:prstGeom>
+          <a:noFill/>
+          <a:ln/>
+        </p:spPr>
+        <p:txBody>
+          <a:bodyPr wrap="square" lIns="0" tIns="0" rIns="0" bIns="0" rtlCol="0" anchor="ctr"/>
+          <a:lstStyle/>
+          <a:p>
+            <a:pPr algn="ctr" indent="0" marL="0">
+              <a:buNone/>
+            </a:pPr>
+            <a:r>
+              <a:rPr lang="en-US" sz="1050" dirty="0">
+                <a:solidFill>
+                  <a:srgbClr val="14202B"/>
+                </a:solidFill>
+                <a:latin typeface="Courier New" pitchFamily="34" charset="0"/>
+                <a:ea typeface="Courier New" pitchFamily="34" charset="-122"/>
+                <a:cs typeface="Courier New" pitchFamily="34" charset="-120"/>
+              </a:rPr>
+              <a:t>Redshift</a:t>
+            </a:r>
+            <a:endParaRPr lang="en-US" sz="1050" dirty="0"/>
+          </a:p>
+        </p:txBody>
+      </p:sp>
+      <p:sp>
+        <p:nvSpPr>
+          <p:cNvPr id="30" name="Shape 28"/>
+          <p:cNvSpPr/>
+          <p:nvPr/>
+        </p:nvSpPr>
+        <p:spPr>
+          <a:xfrm>
+            <a:off x="8421624" y="5760720"/>
+            <a:ext cx="1371600" cy="301752"/>
+          </a:xfrm>
+          <a:prstGeom prst="roundRect">
+            <a:avLst>
+              <a:gd name="adj" fmla="val 15152"/>
+            </a:avLst>
+          </a:prstGeom>
+          <a:solidFill>
+            <a:srgbClr val="DCE8F2"/>
+          </a:solidFill>
+          <a:ln w="9525">
+            <a:solidFill>
+              <a:srgbClr val="D3DBE0"/>
+            </a:solidFill>
+            <a:prstDash val="solid"/>
+          </a:ln>
+        </p:spPr>
+      </p:sp>
+      <p:sp>
+        <p:nvSpPr>
+          <p:cNvPr id="31" name="Text 29"/>
+          <p:cNvSpPr/>
+          <p:nvPr/>
+        </p:nvSpPr>
+        <p:spPr>
+          <a:xfrm>
+            <a:off x="8421624" y="5760720"/>
+            <a:ext cx="1371600" cy="301752"/>
+          </a:xfrm>
+          <a:prstGeom prst="rect">
+            <a:avLst/>
+          </a:prstGeom>
+          <a:noFill/>
+          <a:ln/>
+        </p:spPr>
+        <p:txBody>
+          <a:bodyPr wrap="square" lIns="0" tIns="0" rIns="0" bIns="0" rtlCol="0" anchor="ctr"/>
+          <a:lstStyle/>
+          <a:p>
+            <a:pPr algn="ctr" indent="0" marL="0">
+              <a:buNone/>
+            </a:pPr>
+            <a:r>
+              <a:rPr lang="en-US" sz="1050" dirty="0">
+                <a:solidFill>
+                  <a:srgbClr val="14202B"/>
+                </a:solidFill>
+                <a:latin typeface="Courier New" pitchFamily="34" charset="0"/>
+                <a:ea typeface="Courier New" pitchFamily="34" charset="-122"/>
+                <a:cs typeface="Courier New" pitchFamily="34" charset="-120"/>
+              </a:rPr>
+              <a:t>Athena</a:t>
+            </a:r>
+            <a:endParaRPr lang="en-US" sz="1050" dirty="0"/>
+          </a:p>
+        </p:txBody>
+      </p:sp>
+      <p:sp>
+        <p:nvSpPr>
+          <p:cNvPr id="32" name="Text 30"/>
+          <p:cNvSpPr/>
+          <p:nvPr/>
+        </p:nvSpPr>
+        <p:spPr>
+          <a:xfrm>
+            <a:off x="9966960" y="5779008"/>
+            <a:ext cx="2011680" cy="274320"/>
+          </a:xfrm>
+          <a:prstGeom prst="rect">
+            <a:avLst/>
+          </a:prstGeom>
+          <a:noFill/>
+          <a:ln/>
+        </p:spPr>
+        <p:txBody>
+          <a:bodyPr wrap="square" lIns="0" tIns="0" rIns="0" bIns="0" rtlCol="0" anchor="ctr"/>
+          <a:lstStyle/>
+          <a:p>
+            <a:pPr indent="0" marL="0">
+              <a:buNone/>
+            </a:pPr>
+            <a:r>
+              <a:rPr lang="en-US" sz="850" dirty="0">
+                <a:solidFill>
+                  <a:srgbClr val="5C6B74"/>
+                </a:solidFill>
+                <a:latin typeface="Calibri" pitchFamily="34" charset="0"/>
+                <a:ea typeface="Calibri" pitchFamily="34" charset="-122"/>
+                <a:cs typeface="Calibri" pitchFamily="34" charset="-120"/>
+              </a:rPr>
+              <a:t>information_schema + sqlglot — DuckDB needs no credentials, so the path is proven without one</a:t>
+            </a:r>
+            <a:endParaRPr lang="en-US" sz="850" dirty="0"/>
+          </a:p>
+        </p:txBody>
+      </p:sp>
+      <p:sp>
+        <p:nvSpPr>
+          <p:cNvPr id="33" name="Text 31"/>
           <p:cNvSpPr/>
           <p:nvPr/>
         </p:nvSpPr>

--- a/docs/Concordance-deck.pptx
+++ b/docs/Concordance-deck.pptx
@@ -5603,7 +5603,7 @@
                 <a:ea typeface="Cambria" pitchFamily="34" charset="-122"/>
                 <a:cs typeface="Cambria" pitchFamily="34" charset="-120"/>
               </a:rPr>
-              <a:t>14,572</a:t>
+              <a:t>13,943</a:t>
             </a:r>
             <a:endParaRPr lang="en-US" sz="3400" dirty="0"/>
           </a:p>

--- a/docs/Concordance-deck.pptx
+++ b/docs/Concordance-deck.pptx
@@ -2206,7 +2206,7 @@
                 <a:ea typeface="Calibri" pitchFamily="34" charset="-122"/>
                 <a:cs typeface="Calibri" pitchFamily="34" charset="-120"/>
               </a:rPr>
-              <a:t>Both Power BI formats. 797 tests. Drift, reconciliation against DuckDB, lineage to source, RLS and calculation-group logic, the 15-tool chatbot and the decision log — all verified against real models. Several bugs here were found that way, not by unit tests.</a:t>
+              <a:t>Both Power BI formats. 801 tests. Drift, reconciliation against DuckDB, lineage to source, RLS and calculation-group logic, the 15-tool chatbot and the decision log — all verified against real models. Several bugs here were found that way, not by unit tests.</a:t>
             </a:r>
             <a:endParaRPr lang="en-US" sz="1200" dirty="0"/>
           </a:p>
@@ -2876,7 +2876,7 @@
                 <a:ea typeface="Calibri" pitchFamily="34" charset="-122"/>
                 <a:cs typeface="Calibri" pitchFamily="34" charset="-120"/>
               </a:rPr>
-              <a:t>Lexer-based canonicalisation, a real AST for SQL, 797 tests, no regex</a:t>
+              <a:t>Lexer-based canonicalisation, a real AST for SQL, 801 tests, no regex</a:t>
             </a:r>
             <a:endParaRPr lang="en-US" sz="1250" dirty="0"/>
           </a:p>
@@ -5603,7 +5603,7 @@
                 <a:ea typeface="Cambria" pitchFamily="34" charset="-122"/>
                 <a:cs typeface="Cambria" pitchFamily="34" charset="-120"/>
               </a:rPr>
-              <a:t>13,943</a:t>
+              <a:t>14,012</a:t>
             </a:r>
             <a:endParaRPr lang="en-US" sz="3400" dirty="0"/>
           </a:p>
@@ -5813,7 +5813,7 @@
                 <a:ea typeface="Cambria" pitchFamily="34" charset="-122"/>
                 <a:cs typeface="Cambria" pitchFamily="34" charset="-120"/>
               </a:rPr>
-              <a:t>797</a:t>
+              <a:t>801</a:t>
             </a:r>
             <a:endParaRPr lang="en-US" sz="3400" dirty="0"/>
           </a:p>
